--- a/supply_chain_risk_ai_deck.pptx
+++ b/supply_chain_risk_ai_deck.pptx
@@ -1700,6 +1700,10 @@
             <a:prstDash val="solid"/>
           </a:ln>
         </p:spPr>
+        <p:txBody>
+          <a:bodyPr/>
+          <a:p/>
+        </p:txBody>
       </p:sp>
       <p:sp>
         <p:nvSpPr>
@@ -1822,6 +1826,10 @@
             <a:prstDash val="solid"/>
           </a:ln>
         </p:spPr>
+        <p:txBody>
+          <a:bodyPr/>
+          <a:p/>
+        </p:txBody>
       </p:sp>
       <p:sp>
         <p:nvSpPr>
@@ -1885,6 +1893,10 @@
             <a:prstDash val="solid"/>
           </a:ln>
         </p:spPr>
+        <p:txBody>
+          <a:bodyPr/>
+          <a:p/>
+        </p:txBody>
       </p:sp>
       <p:sp>
         <p:nvSpPr>
@@ -1948,6 +1960,10 @@
             <a:prstDash val="solid"/>
           </a:ln>
         </p:spPr>
+        <p:txBody>
+          <a:bodyPr/>
+          <a:p/>
+        </p:txBody>
       </p:sp>
       <p:sp>
         <p:nvSpPr>
@@ -2011,6 +2027,10 @@
             <a:prstDash val="solid"/>
           </a:ln>
         </p:spPr>
+        <p:txBody>
+          <a:bodyPr/>
+          <a:p/>
+        </p:txBody>
       </p:sp>
       <p:sp>
         <p:nvSpPr>
@@ -2074,6 +2094,10 @@
             <a:prstDash val="solid"/>
           </a:ln>
         </p:spPr>
+        <p:txBody>
+          <a:bodyPr/>
+          <a:p/>
+        </p:txBody>
       </p:sp>
       <p:sp>
         <p:nvSpPr>
@@ -2137,6 +2161,10 @@
             <a:prstDash val="solid"/>
           </a:ln>
         </p:spPr>
+        <p:txBody>
+          <a:bodyPr/>
+          <a:p/>
+        </p:txBody>
       </p:sp>
       <p:sp>
         <p:nvSpPr>
@@ -2266,6 +2294,10 @@
             <a:prstDash val="solid"/>
           </a:ln>
         </p:spPr>
+        <p:txBody>
+          <a:bodyPr/>
+          <a:p/>
+        </p:txBody>
       </p:sp>
       <p:sp>
         <p:nvSpPr>
@@ -2751,6 +2783,10 @@
             <a:prstDash val="solid"/>
           </a:ln>
         </p:spPr>
+        <p:txBody>
+          <a:bodyPr/>
+          <a:p/>
+        </p:txBody>
       </p:sp>
       <p:sp>
         <p:nvSpPr>
@@ -2822,6 +2858,10 @@
             </a:outerShdw>
           </a:effectLst>
         </p:spPr>
+        <p:txBody>
+          <a:bodyPr/>
+          <a:p/>
+        </p:txBody>
       </p:sp>
       <p:sp>
         <p:nvSpPr>
@@ -2847,6 +2887,10 @@
             <a:prstDash val="solid"/>
           </a:ln>
         </p:spPr>
+        <p:txBody>
+          <a:bodyPr/>
+          <a:p/>
+        </p:txBody>
       </p:sp>
       <p:sp>
         <p:nvSpPr>
@@ -2872,6 +2916,10 @@
             <a:prstDash val="solid"/>
           </a:ln>
         </p:spPr>
+        <p:txBody>
+          <a:bodyPr/>
+          <a:p/>
+        </p:txBody>
       </p:sp>
       <p:sp>
         <p:nvSpPr>
@@ -3021,6 +3069,10 @@
             </a:outerShdw>
           </a:effectLst>
         </p:spPr>
+        <p:txBody>
+          <a:bodyPr/>
+          <a:p/>
+        </p:txBody>
       </p:sp>
       <p:sp>
         <p:nvSpPr>
@@ -3046,6 +3098,10 @@
             <a:prstDash val="solid"/>
           </a:ln>
         </p:spPr>
+        <p:txBody>
+          <a:bodyPr/>
+          <a:p/>
+        </p:txBody>
       </p:sp>
       <p:sp>
         <p:nvSpPr>
@@ -3071,6 +3127,10 @@
             <a:prstDash val="solid"/>
           </a:ln>
         </p:spPr>
+        <p:txBody>
+          <a:bodyPr/>
+          <a:p/>
+        </p:txBody>
       </p:sp>
       <p:sp>
         <p:nvSpPr>
@@ -3220,6 +3280,10 @@
             </a:outerShdw>
           </a:effectLst>
         </p:spPr>
+        <p:txBody>
+          <a:bodyPr/>
+          <a:p/>
+        </p:txBody>
       </p:sp>
       <p:sp>
         <p:nvSpPr>
@@ -3245,6 +3309,10 @@
             <a:prstDash val="solid"/>
           </a:ln>
         </p:spPr>
+        <p:txBody>
+          <a:bodyPr/>
+          <a:p/>
+        </p:txBody>
       </p:sp>
       <p:sp>
         <p:nvSpPr>
@@ -3270,6 +3338,10 @@
             <a:prstDash val="solid"/>
           </a:ln>
         </p:spPr>
+        <p:txBody>
+          <a:bodyPr/>
+          <a:p/>
+        </p:txBody>
       </p:sp>
       <p:sp>
         <p:nvSpPr>
@@ -3480,6 +3552,10 @@
             <a:prstDash val="solid"/>
           </a:ln>
         </p:spPr>
+        <p:txBody>
+          <a:bodyPr/>
+          <a:p/>
+        </p:txBody>
       </p:sp>
       <p:sp>
         <p:nvSpPr>
@@ -3720,6 +3796,10 @@
             </a:outerShdw>
           </a:effectLst>
         </p:spPr>
+        <p:txBody>
+          <a:bodyPr/>
+          <a:p/>
+        </p:txBody>
       </p:sp>
       <p:sp>
         <p:nvSpPr>
@@ -3754,7 +3834,7 @@
                 <a:ea typeface="Calibri" pitchFamily="34" charset="-122"/>
                 <a:cs typeface="Calibri" pitchFamily="34" charset="-120"/>
               </a:rPr>
-              <a:t>~95%</a:t>
+              <a:t>~99%</a:t>
             </a:r>
             <a:endParaRPr lang="en-US" sz="3400" dirty="0"/>
           </a:p>
@@ -3830,6 +3910,10 @@
             </a:outerShdw>
           </a:effectLst>
         </p:spPr>
+        <p:txBody>
+          <a:bodyPr/>
+          <a:p/>
+        </p:txBody>
       </p:sp>
       <p:sp>
         <p:nvSpPr>
@@ -3940,6 +4024,10 @@
             </a:outerShdw>
           </a:effectLst>
         </p:spPr>
+        <p:txBody>
+          <a:bodyPr/>
+          <a:p/>
+        </p:txBody>
       </p:sp>
       <p:sp>
         <p:nvSpPr>
@@ -4050,6 +4138,10 @@
             </a:outerShdw>
           </a:effectLst>
         </p:spPr>
+        <p:txBody>
+          <a:bodyPr/>
+          <a:p/>
+        </p:txBody>
       </p:sp>
       <p:sp>
         <p:nvSpPr>
@@ -4221,6 +4313,10 @@
             <a:prstDash val="solid"/>
           </a:ln>
         </p:spPr>
+        <p:txBody>
+          <a:bodyPr/>
+          <a:p/>
+        </p:txBody>
       </p:sp>
       <p:sp>
         <p:nvSpPr>
@@ -4285,6 +4381,10 @@
             <a:prstDash val="solid"/>
           </a:ln>
         </p:spPr>
+        <p:txBody>
+          <a:bodyPr/>
+          <a:p/>
+        </p:txBody>
       </p:sp>
       <p:sp>
         <p:nvSpPr>
@@ -4366,6 +4466,10 @@
             <a:prstDash val="solid"/>
           </a:ln>
         </p:spPr>
+        <p:txBody>
+          <a:bodyPr/>
+          <a:p/>
+        </p:txBody>
       </p:sp>
       <p:sp>
         <p:nvSpPr>
@@ -4391,6 +4495,10 @@
             <a:prstDash val="solid"/>
           </a:ln>
         </p:spPr>
+        <p:txBody>
+          <a:bodyPr/>
+          <a:p/>
+        </p:txBody>
       </p:sp>
       <p:sp>
         <p:nvSpPr>
@@ -4472,6 +4580,10 @@
             <a:prstDash val="solid"/>
           </a:ln>
         </p:spPr>
+        <p:txBody>
+          <a:bodyPr/>
+          <a:p/>
+        </p:txBody>
       </p:sp>
       <p:sp>
         <p:nvSpPr>
@@ -4497,6 +4609,10 @@
             <a:prstDash val="solid"/>
           </a:ln>
         </p:spPr>
+        <p:txBody>
+          <a:bodyPr/>
+          <a:p/>
+        </p:txBody>
       </p:sp>
       <p:sp>
         <p:nvSpPr>
@@ -4578,6 +4694,10 @@
             <a:prstDash val="solid"/>
           </a:ln>
         </p:spPr>
+        <p:txBody>
+          <a:bodyPr/>
+          <a:p/>
+        </p:txBody>
       </p:sp>
       <p:sp>
         <p:nvSpPr>
@@ -4603,6 +4723,10 @@
             <a:prstDash val="solid"/>
           </a:ln>
         </p:spPr>
+        <p:txBody>
+          <a:bodyPr/>
+          <a:p/>
+        </p:txBody>
       </p:sp>
       <p:sp>
         <p:nvSpPr>
@@ -4684,6 +4808,10 @@
             <a:prstDash val="solid"/>
           </a:ln>
         </p:spPr>
+        <p:txBody>
+          <a:bodyPr/>
+          <a:p/>
+        </p:txBody>
       </p:sp>
       <p:sp>
         <p:nvSpPr>
@@ -4709,6 +4837,10 @@
             <a:prstDash val="solid"/>
           </a:ln>
         </p:spPr>
+        <p:txBody>
+          <a:bodyPr/>
+          <a:p/>
+        </p:txBody>
       </p:sp>
       <p:sp>
         <p:nvSpPr>
@@ -4790,6 +4922,10 @@
             <a:prstDash val="solid"/>
           </a:ln>
         </p:spPr>
+        <p:txBody>
+          <a:bodyPr/>
+          <a:p/>
+        </p:txBody>
       </p:sp>
       <p:sp>
         <p:nvSpPr>
@@ -4815,6 +4951,10 @@
             <a:prstDash val="solid"/>
           </a:ln>
         </p:spPr>
+        <p:txBody>
+          <a:bodyPr/>
+          <a:p/>
+        </p:txBody>
       </p:sp>
       <p:sp>
         <p:nvSpPr>
@@ -4896,6 +5036,10 @@
             <a:prstDash val="solid"/>
           </a:ln>
         </p:spPr>
+        <p:txBody>
+          <a:bodyPr/>
+          <a:p/>
+        </p:txBody>
       </p:sp>
       <p:sp>
         <p:nvSpPr>
@@ -4921,6 +5065,10 @@
             <a:prstDash val="solid"/>
           </a:ln>
         </p:spPr>
+        <p:txBody>
+          <a:bodyPr/>
+          <a:p/>
+        </p:txBody>
       </p:sp>
       <p:sp>
         <p:nvSpPr>
@@ -5002,6 +5150,10 @@
             <a:prstDash val="solid"/>
           </a:ln>
         </p:spPr>
+        <p:txBody>
+          <a:bodyPr/>
+          <a:p/>
+        </p:txBody>
       </p:sp>
       <p:sp>
         <p:nvSpPr>
@@ -5027,6 +5179,10 @@
             <a:prstDash val="solid"/>
           </a:ln>
         </p:spPr>
+        <p:txBody>
+          <a:bodyPr/>
+          <a:p/>
+        </p:txBody>
       </p:sp>
       <p:sp>
         <p:nvSpPr>
@@ -5108,6 +5264,10 @@
             <a:prstDash val="solid"/>
           </a:ln>
         </p:spPr>
+        <p:txBody>
+          <a:bodyPr/>
+          <a:p/>
+        </p:txBody>
       </p:sp>
       <p:sp>
         <p:nvSpPr>
@@ -5253,6 +5413,10 @@
             <a:prstDash val="solid"/>
           </a:ln>
         </p:spPr>
+        <p:txBody>
+          <a:bodyPr/>
+          <a:p/>
+        </p:txBody>
       </p:sp>
       <p:sp>
         <p:nvSpPr>
@@ -5385,6 +5549,10 @@
             <a:prstDash val="solid"/>
           </a:ln>
         </p:spPr>
+        <p:txBody>
+          <a:bodyPr/>
+          <a:p/>
+        </p:txBody>
       </p:sp>
       <p:sp>
         <p:nvSpPr>
@@ -5456,6 +5624,10 @@
             </a:outerShdw>
           </a:effectLst>
         </p:spPr>
+        <p:txBody>
+          <a:bodyPr/>
+          <a:p/>
+        </p:txBody>
       </p:sp>
       <p:sp>
         <p:nvSpPr>
@@ -5481,6 +5653,10 @@
             <a:prstDash val="solid"/>
           </a:ln>
         </p:spPr>
+        <p:txBody>
+          <a:bodyPr/>
+          <a:p/>
+        </p:txBody>
       </p:sp>
       <p:sp>
         <p:nvSpPr>
@@ -5627,6 +5803,10 @@
             </a:outerShdw>
           </a:effectLst>
         </p:spPr>
+        <p:txBody>
+          <a:bodyPr/>
+          <a:p/>
+        </p:txBody>
       </p:sp>
       <p:sp>
         <p:nvSpPr>
@@ -5652,6 +5832,10 @@
             <a:prstDash val="solid"/>
           </a:ln>
         </p:spPr>
+        <p:txBody>
+          <a:bodyPr/>
+          <a:p/>
+        </p:txBody>
       </p:sp>
       <p:sp>
         <p:nvSpPr>
@@ -5798,6 +5982,10 @@
             </a:outerShdw>
           </a:effectLst>
         </p:spPr>
+        <p:txBody>
+          <a:bodyPr/>
+          <a:p/>
+        </p:txBody>
       </p:sp>
       <p:sp>
         <p:nvSpPr>
@@ -5823,6 +6011,10 @@
             <a:prstDash val="solid"/>
           </a:ln>
         </p:spPr>
+        <p:txBody>
+          <a:bodyPr/>
+          <a:p/>
+        </p:txBody>
       </p:sp>
       <p:sp>
         <p:nvSpPr>
@@ -5969,6 +6161,10 @@
             </a:outerShdw>
           </a:effectLst>
         </p:spPr>
+        <p:txBody>
+          <a:bodyPr/>
+          <a:p/>
+        </p:txBody>
       </p:sp>
       <p:sp>
         <p:nvSpPr>
@@ -5994,6 +6190,10 @@
             <a:prstDash val="solid"/>
           </a:ln>
         </p:spPr>
+        <p:txBody>
+          <a:bodyPr/>
+          <a:p/>
+        </p:txBody>
       </p:sp>
       <p:sp>
         <p:nvSpPr>
@@ -6140,6 +6340,10 @@
             </a:outerShdw>
           </a:effectLst>
         </p:spPr>
+        <p:txBody>
+          <a:bodyPr/>
+          <a:p/>
+        </p:txBody>
       </p:sp>
       <p:sp>
         <p:nvSpPr>
@@ -6165,6 +6369,10 @@
             <a:prstDash val="solid"/>
           </a:ln>
         </p:spPr>
+        <p:txBody>
+          <a:bodyPr/>
+          <a:p/>
+        </p:txBody>
       </p:sp>
       <p:sp>
         <p:nvSpPr>
@@ -6311,6 +6519,10 @@
             </a:outerShdw>
           </a:effectLst>
         </p:spPr>
+        <p:txBody>
+          <a:bodyPr/>
+          <a:p/>
+        </p:txBody>
       </p:sp>
       <p:sp>
         <p:nvSpPr>
@@ -6336,6 +6548,10 @@
             <a:prstDash val="solid"/>
           </a:ln>
         </p:spPr>
+        <p:txBody>
+          <a:bodyPr/>
+          <a:p/>
+        </p:txBody>
       </p:sp>
       <p:sp>
         <p:nvSpPr>
@@ -6482,6 +6698,10 @@
             </a:outerShdw>
           </a:effectLst>
         </p:spPr>
+        <p:txBody>
+          <a:bodyPr/>
+          <a:p/>
+        </p:txBody>
       </p:sp>
       <p:sp>
         <p:nvSpPr>
@@ -6507,6 +6727,10 @@
             <a:prstDash val="solid"/>
           </a:ln>
         </p:spPr>
+        <p:txBody>
+          <a:bodyPr/>
+          <a:p/>
+        </p:txBody>
       </p:sp>
       <p:sp>
         <p:nvSpPr>
@@ -6714,6 +6938,10 @@
             <a:prstDash val="solid"/>
           </a:ln>
         </p:spPr>
+        <p:txBody>
+          <a:bodyPr/>
+          <a:p/>
+        </p:txBody>
       </p:sp>
       <p:sp>
         <p:nvSpPr>
@@ -6785,6 +7013,10 @@
             </a:outerShdw>
           </a:effectLst>
         </p:spPr>
+        <p:txBody>
+          <a:bodyPr/>
+          <a:p/>
+        </p:txBody>
       </p:sp>
       <p:sp>
         <p:nvSpPr>
@@ -6810,6 +7042,10 @@
             <a:prstDash val="solid"/>
           </a:ln>
         </p:spPr>
+        <p:txBody>
+          <a:bodyPr/>
+          <a:p/>
+        </p:txBody>
       </p:sp>
       <p:sp>
         <p:nvSpPr>
@@ -6920,6 +7156,10 @@
             </a:outerShdw>
           </a:effectLst>
         </p:spPr>
+        <p:txBody>
+          <a:bodyPr/>
+          <a:p/>
+        </p:txBody>
       </p:sp>
       <p:sp>
         <p:nvSpPr>
@@ -6945,6 +7185,10 @@
             <a:prstDash val="solid"/>
           </a:ln>
         </p:spPr>
+        <p:txBody>
+          <a:bodyPr/>
+          <a:p/>
+        </p:txBody>
       </p:sp>
       <p:sp>
         <p:nvSpPr>
@@ -7055,6 +7299,10 @@
             </a:outerShdw>
           </a:effectLst>
         </p:spPr>
+        <p:txBody>
+          <a:bodyPr/>
+          <a:p/>
+        </p:txBody>
       </p:sp>
       <p:sp>
         <p:nvSpPr>
@@ -7080,6 +7328,10 @@
             <a:prstDash val="solid"/>
           </a:ln>
         </p:spPr>
+        <p:txBody>
+          <a:bodyPr/>
+          <a:p/>
+        </p:txBody>
       </p:sp>
       <p:sp>
         <p:nvSpPr>
@@ -7190,6 +7442,10 @@
             </a:outerShdw>
           </a:effectLst>
         </p:spPr>
+        <p:txBody>
+          <a:bodyPr/>
+          <a:p/>
+        </p:txBody>
       </p:sp>
       <p:sp>
         <p:nvSpPr>
@@ -7215,6 +7471,10 @@
             <a:prstDash val="solid"/>
           </a:ln>
         </p:spPr>
+        <p:txBody>
+          <a:bodyPr/>
+          <a:p/>
+        </p:txBody>
       </p:sp>
       <p:sp>
         <p:nvSpPr>
@@ -7325,6 +7585,10 @@
             </a:outerShdw>
           </a:effectLst>
         </p:spPr>
+        <p:txBody>
+          <a:bodyPr/>
+          <a:p/>
+        </p:txBody>
       </p:sp>
       <p:sp>
         <p:nvSpPr>
@@ -7350,6 +7614,10 @@
             <a:prstDash val="solid"/>
           </a:ln>
         </p:spPr>
+        <p:txBody>
+          <a:bodyPr/>
+          <a:p/>
+        </p:txBody>
       </p:sp>
       <p:sp>
         <p:nvSpPr>
@@ -7460,6 +7728,10 @@
             </a:outerShdw>
           </a:effectLst>
         </p:spPr>
+        <p:txBody>
+          <a:bodyPr/>
+          <a:p/>
+        </p:txBody>
       </p:sp>
       <p:sp>
         <p:nvSpPr>
@@ -7485,6 +7757,10 @@
             <a:prstDash val="solid"/>
           </a:ln>
         </p:spPr>
+        <p:txBody>
+          <a:bodyPr/>
+          <a:p/>
+        </p:txBody>
       </p:sp>
       <p:sp>
         <p:nvSpPr>
@@ -7595,6 +7871,10 @@
             </a:outerShdw>
           </a:effectLst>
         </p:spPr>
+        <p:txBody>
+          <a:bodyPr/>
+          <a:p/>
+        </p:txBody>
       </p:sp>
       <p:sp>
         <p:nvSpPr>
@@ -7705,6 +7985,10 @@
             </a:outerShdw>
           </a:effectLst>
         </p:spPr>
+        <p:txBody>
+          <a:bodyPr/>
+          <a:p/>
+        </p:txBody>
       </p:sp>
       <p:sp>
         <p:nvSpPr>
@@ -7815,6 +8099,10 @@
             </a:outerShdw>
           </a:effectLst>
         </p:spPr>
+        <p:txBody>
+          <a:bodyPr/>
+          <a:p/>
+        </p:txBody>
       </p:sp>
       <p:sp>
         <p:nvSpPr>
@@ -7925,6 +8213,10 @@
             </a:outerShdw>
           </a:effectLst>
         </p:spPr>
+        <p:txBody>
+          <a:bodyPr/>
+          <a:p/>
+        </p:txBody>
       </p:sp>
       <p:sp>
         <p:nvSpPr>
@@ -8096,6 +8388,10 @@
             <a:prstDash val="solid"/>
           </a:ln>
         </p:spPr>
+        <p:txBody>
+          <a:bodyPr/>
+          <a:p/>
+        </p:txBody>
       </p:sp>
       <p:sp>
         <p:nvSpPr>
@@ -8167,6 +8463,10 @@
             </a:outerShdw>
           </a:effectLst>
         </p:spPr>
+        <p:txBody>
+          <a:bodyPr/>
+          <a:p/>
+        </p:txBody>
       </p:sp>
       <p:sp>
         <p:nvSpPr>
@@ -8192,6 +8492,10 @@
             <a:prstDash val="solid"/>
           </a:ln>
         </p:spPr>
+        <p:txBody>
+          <a:bodyPr/>
+          <a:p/>
+        </p:txBody>
       </p:sp>
       <p:sp>
         <p:nvSpPr>
@@ -8341,6 +8645,10 @@
             </a:outerShdw>
           </a:effectLst>
         </p:spPr>
+        <p:txBody>
+          <a:bodyPr/>
+          <a:p/>
+        </p:txBody>
       </p:sp>
       <p:sp>
         <p:nvSpPr>
@@ -8366,6 +8674,10 @@
             <a:prstDash val="solid"/>
           </a:ln>
         </p:spPr>
+        <p:txBody>
+          <a:bodyPr/>
+          <a:p/>
+        </p:txBody>
       </p:sp>
       <p:sp>
         <p:nvSpPr>
@@ -8515,6 +8827,10 @@
             </a:outerShdw>
           </a:effectLst>
         </p:spPr>
+        <p:txBody>
+          <a:bodyPr/>
+          <a:p/>
+        </p:txBody>
       </p:sp>
       <p:sp>
         <p:nvSpPr>
@@ -8540,6 +8856,10 @@
             <a:prstDash val="solid"/>
           </a:ln>
         </p:spPr>
+        <p:txBody>
+          <a:bodyPr/>
+          <a:p/>
+        </p:txBody>
       </p:sp>
       <p:sp>
         <p:nvSpPr>
@@ -8689,6 +9009,10 @@
             </a:outerShdw>
           </a:effectLst>
         </p:spPr>
+        <p:txBody>
+          <a:bodyPr/>
+          <a:p/>
+        </p:txBody>
       </p:sp>
       <p:sp>
         <p:nvSpPr>
@@ -8714,6 +9038,10 @@
             <a:prstDash val="solid"/>
           </a:ln>
         </p:spPr>
+        <p:txBody>
+          <a:bodyPr/>
+          <a:p/>
+        </p:txBody>
       </p:sp>
       <p:sp>
         <p:nvSpPr>
@@ -8863,6 +9191,10 @@
             </a:outerShdw>
           </a:effectLst>
         </p:spPr>
+        <p:txBody>
+          <a:bodyPr/>
+          <a:p/>
+        </p:txBody>
       </p:sp>
       <p:sp>
         <p:nvSpPr>
@@ -8888,6 +9220,10 @@
             <a:prstDash val="solid"/>
           </a:ln>
         </p:spPr>
+        <p:txBody>
+          <a:bodyPr/>
+          <a:p/>
+        </p:txBody>
       </p:sp>
       <p:sp>
         <p:nvSpPr>
@@ -9037,6 +9373,10 @@
             </a:outerShdw>
           </a:effectLst>
         </p:spPr>
+        <p:txBody>
+          <a:bodyPr/>
+          <a:p/>
+        </p:txBody>
       </p:sp>
       <p:sp>
         <p:nvSpPr>
@@ -9062,6 +9402,10 @@
             <a:prstDash val="solid"/>
           </a:ln>
         </p:spPr>
+        <p:txBody>
+          <a:bodyPr/>
+          <a:p/>
+        </p:txBody>
       </p:sp>
       <p:sp>
         <p:nvSpPr>
@@ -9272,6 +9616,10 @@
             <a:prstDash val="solid"/>
           </a:ln>
         </p:spPr>
+        <p:txBody>
+          <a:bodyPr/>
+          <a:p/>
+        </p:txBody>
       </p:sp>
       <p:sp>
         <p:nvSpPr>
@@ -9382,6 +9730,10 @@
             </a:outerShdw>
           </a:effectLst>
         </p:spPr>
+        <p:txBody>
+          <a:bodyPr/>
+          <a:p/>
+        </p:txBody>
       </p:sp>
       <p:sp>
         <p:nvSpPr>
@@ -9407,6 +9759,10 @@
             <a:prstDash val="solid"/>
           </a:ln>
         </p:spPr>
+        <p:txBody>
+          <a:bodyPr/>
+          <a:p/>
+        </p:txBody>
       </p:sp>
       <p:sp>
         <p:nvSpPr>
@@ -9517,6 +9873,10 @@
             </a:outerShdw>
           </a:effectLst>
         </p:spPr>
+        <p:txBody>
+          <a:bodyPr/>
+          <a:p/>
+        </p:txBody>
       </p:sp>
       <p:sp>
         <p:nvSpPr>
@@ -9542,6 +9902,10 @@
             <a:prstDash val="solid"/>
           </a:ln>
         </p:spPr>
+        <p:txBody>
+          <a:bodyPr/>
+          <a:p/>
+        </p:txBody>
       </p:sp>
       <p:sp>
         <p:nvSpPr>
@@ -9652,6 +10016,10 @@
             </a:outerShdw>
           </a:effectLst>
         </p:spPr>
+        <p:txBody>
+          <a:bodyPr/>
+          <a:p/>
+        </p:txBody>
       </p:sp>
       <p:sp>
         <p:nvSpPr>
@@ -9677,6 +10045,10 @@
             <a:prstDash val="solid"/>
           </a:ln>
         </p:spPr>
+        <p:txBody>
+          <a:bodyPr/>
+          <a:p/>
+        </p:txBody>
       </p:sp>
       <p:sp>
         <p:nvSpPr>
@@ -9750,7 +10122,7 @@
                 <a:ea typeface="Calibri" pitchFamily="34" charset="-122"/>
                 <a:cs typeface="Calibri" pitchFamily="34" charset="-120"/>
               </a:rPr>
-              <a:t>Re-runs pipeline if Judge &lt; 0.5 quality score (max 1 retry)</a:t>
+              <a:t>Re-runs pipeline if Judge &lt; 0.5 quality score (dynamic: 0 retries (Groq) · 1 retry (GPT-4o-mini))</a:t>
             </a:r>
             <a:endParaRPr lang="en-US" sz="950" dirty="0"/>
           </a:p>
@@ -9787,6 +10159,10 @@
             </a:outerShdw>
           </a:effectLst>
         </p:spPr>
+        <p:txBody>
+          <a:bodyPr/>
+          <a:p/>
+        </p:txBody>
       </p:sp>
       <p:sp>
         <p:nvSpPr>
@@ -9812,6 +10188,10 @@
             <a:prstDash val="solid"/>
           </a:ln>
         </p:spPr>
+        <p:txBody>
+          <a:bodyPr/>
+          <a:p/>
+        </p:txBody>
       </p:sp>
       <p:sp>
         <p:nvSpPr>
@@ -9954,6 +10334,10 @@
             <a:prstDash val="solid"/>
           </a:ln>
         </p:spPr>
+        <p:txBody>
+          <a:bodyPr/>
+          <a:p/>
+        </p:txBody>
       </p:sp>
       <p:sp>
         <p:nvSpPr>
@@ -10096,6 +10480,10 @@
             <a:prstDash val="solid"/>
           </a:ln>
         </p:spPr>
+        <p:txBody>
+          <a:bodyPr/>
+          <a:p/>
+        </p:txBody>
       </p:sp>
       <p:sp>
         <p:nvSpPr>
@@ -10238,6 +10626,10 @@
             <a:prstDash val="solid"/>
           </a:ln>
         </p:spPr>
+        <p:txBody>
+          <a:bodyPr/>
+          <a:p/>
+        </p:txBody>
       </p:sp>
       <p:sp>
         <p:nvSpPr>
@@ -10487,6 +10879,10 @@
             <a:prstDash val="solid"/>
           </a:ln>
         </p:spPr>
+        <p:txBody>
+          <a:bodyPr/>
+          <a:p/>
+        </p:txBody>
       </p:sp>
       <p:sp>
         <p:nvSpPr>
@@ -10558,6 +10954,10 @@
             </a:outerShdw>
           </a:effectLst>
         </p:spPr>
+        <p:txBody>
+          <a:bodyPr/>
+          <a:p/>
+        </p:txBody>
       </p:sp>
       <p:sp>
         <p:nvSpPr>
@@ -10583,6 +10983,10 @@
             <a:prstDash val="solid"/>
           </a:ln>
         </p:spPr>
+        <p:txBody>
+          <a:bodyPr/>
+          <a:p/>
+        </p:txBody>
       </p:sp>
       <p:sp>
         <p:nvSpPr>
@@ -10725,6 +11129,10 @@
             <a:prstDash val="solid"/>
           </a:ln>
         </p:spPr>
+        <p:txBody>
+          <a:bodyPr/>
+          <a:p/>
+        </p:txBody>
       </p:sp>
       <p:sp>
         <p:nvSpPr>
@@ -10793,6 +11201,10 @@
             </a:outerShdw>
           </a:effectLst>
         </p:spPr>
+        <p:txBody>
+          <a:bodyPr/>
+          <a:p/>
+        </p:txBody>
       </p:sp>
       <p:sp>
         <p:nvSpPr>
@@ -10818,6 +11230,10 @@
             <a:prstDash val="solid"/>
           </a:ln>
         </p:spPr>
+        <p:txBody>
+          <a:bodyPr/>
+          <a:p/>
+        </p:txBody>
       </p:sp>
       <p:sp>
         <p:nvSpPr>
@@ -10960,6 +11376,10 @@
             <a:prstDash val="solid"/>
           </a:ln>
         </p:spPr>
+        <p:txBody>
+          <a:bodyPr/>
+          <a:p/>
+        </p:txBody>
       </p:sp>
       <p:sp>
         <p:nvSpPr>
@@ -11028,6 +11448,10 @@
             </a:outerShdw>
           </a:effectLst>
         </p:spPr>
+        <p:txBody>
+          <a:bodyPr/>
+          <a:p/>
+        </p:txBody>
       </p:sp>
       <p:sp>
         <p:nvSpPr>
@@ -11053,6 +11477,10 @@
             <a:prstDash val="solid"/>
           </a:ln>
         </p:spPr>
+        <p:txBody>
+          <a:bodyPr/>
+          <a:p/>
+        </p:txBody>
       </p:sp>
       <p:sp>
         <p:nvSpPr>
@@ -11195,6 +11623,10 @@
             <a:prstDash val="solid"/>
           </a:ln>
         </p:spPr>
+        <p:txBody>
+          <a:bodyPr/>
+          <a:p/>
+        </p:txBody>
       </p:sp>
       <p:sp>
         <p:nvSpPr>
@@ -11263,6 +11695,10 @@
             </a:outerShdw>
           </a:effectLst>
         </p:spPr>
+        <p:txBody>
+          <a:bodyPr/>
+          <a:p/>
+        </p:txBody>
       </p:sp>
       <p:sp>
         <p:nvSpPr>
@@ -11288,6 +11724,10 @@
             <a:prstDash val="solid"/>
           </a:ln>
         </p:spPr>
+        <p:txBody>
+          <a:bodyPr/>
+          <a:p/>
+        </p:txBody>
       </p:sp>
       <p:sp>
         <p:nvSpPr>
@@ -11430,6 +11870,10 @@
             <a:prstDash val="solid"/>
           </a:ln>
         </p:spPr>
+        <p:txBody>
+          <a:bodyPr/>
+          <a:p/>
+        </p:txBody>
       </p:sp>
       <p:sp>
         <p:nvSpPr>
@@ -11498,6 +11942,10 @@
             </a:outerShdw>
           </a:effectLst>
         </p:spPr>
+        <p:txBody>
+          <a:bodyPr/>
+          <a:p/>
+        </p:txBody>
       </p:sp>
       <p:sp>
         <p:nvSpPr>
@@ -11523,6 +11971,10 @@
             <a:prstDash val="solid"/>
           </a:ln>
         </p:spPr>
+        <p:txBody>
+          <a:bodyPr/>
+          <a:p/>
+        </p:txBody>
       </p:sp>
       <p:sp>
         <p:nvSpPr>
@@ -11665,6 +12117,10 @@
             <a:prstDash val="solid"/>
           </a:ln>
         </p:spPr>
+        <p:txBody>
+          <a:bodyPr/>
+          <a:p/>
+        </p:txBody>
       </p:sp>
       <p:sp>
         <p:nvSpPr>
@@ -11733,6 +12189,10 @@
             </a:outerShdw>
           </a:effectLst>
         </p:spPr>
+        <p:txBody>
+          <a:bodyPr/>
+          <a:p/>
+        </p:txBody>
       </p:sp>
       <p:sp>
         <p:nvSpPr>
@@ -11758,6 +12218,10 @@
             <a:prstDash val="solid"/>
           </a:ln>
         </p:spPr>
+        <p:txBody>
+          <a:bodyPr/>
+          <a:p/>
+        </p:txBody>
       </p:sp>
       <p:sp>
         <p:nvSpPr>
@@ -11900,6 +12364,10 @@
             <a:prstDash val="solid"/>
           </a:ln>
         </p:spPr>
+        <p:txBody>
+          <a:bodyPr/>
+          <a:p/>
+        </p:txBody>
       </p:sp>
       <p:sp>
         <p:nvSpPr>
